--- a/Vendor_Boards/Microchip_PICDEM 2 plus_board_2010/18f/tutorials/GCBASIC_Part10_EEPROM_ops.pptx
+++ b/Vendor_Boards/Microchip_PICDEM 2 plus_board_2010/18f/tutorials/GCBASIC_Part10_EEPROM_ops.pptx
@@ -5,10 +5,10 @@
     <p:sldMasterId id="2147483660" r:id="rId1"/>
   </p:sldMasterIdLst>
   <p:notesMasterIdLst>
-    <p:notesMasterId r:id="rId21"/>
+    <p:notesMasterId r:id="rId20"/>
   </p:notesMasterIdLst>
   <p:handoutMasterIdLst>
-    <p:handoutMasterId r:id="rId22"/>
+    <p:handoutMasterId r:id="rId21"/>
   </p:handoutMasterIdLst>
   <p:sldIdLst>
     <p:sldId id="345" r:id="rId2"/>
@@ -29,7 +29,6 @@
     <p:sldId id="288" r:id="rId17"/>
     <p:sldId id="344" r:id="rId18"/>
     <p:sldId id="355" r:id="rId19"/>
-    <p:sldId id="356" r:id="rId20"/>
   </p:sldIdLst>
   <p:sldSz cx="9144000" cy="5143500" type="screen16x9"/>
   <p:notesSz cx="6858000" cy="9144000"/>
@@ -214,7 +213,7 @@
             <a:fld id="{742E545A-AB39-44F0-B5A6-04A90C6C9399}" type="datetimeFigureOut">
               <a:rPr lang="en-GB" smtClean="0"/>
               <a:pPr/>
-              <a:t>12/08/2026</a:t>
+              <a:t>13/08/2026</a:t>
             </a:fld>
             <a:endParaRPr lang="en-GB" dirty="0"/>
           </a:p>
@@ -381,7 +380,7 @@
             <a:fld id="{FF100B3C-2E11-428B-8555-A77018253716}" type="datetimeFigureOut">
               <a:rPr lang="en-GB" smtClean="0"/>
               <a:pPr/>
-              <a:t>12/08/2026</a:t>
+              <a:t>13/08/2026</a:t>
             </a:fld>
             <a:endParaRPr lang="en-GB" dirty="0"/>
           </a:p>
@@ -674,7 +673,7 @@
           <p:cNvPr id="7" name="Rectangle 6">
             <a:extLst>
               <a:ext uri="{FF2B5EF4-FFF2-40B4-BE49-F238E27FC236}">
-                <a16:creationId xmlns="" xmlns:a16="http://schemas.microsoft.com/office/drawing/2014/main" id="{9C757326-0232-4CDF-81FF-302CA676961B}"/>
+                <a16:creationId xmlns:a16="http://schemas.microsoft.com/office/drawing/2014/main" xmlns="" id="{9C757326-0232-4CDF-81FF-302CA676961B}"/>
               </a:ext>
             </a:extLst>
           </p:cNvPr>
@@ -726,7 +725,7 @@
           <p:cNvPr id="8" name="Picture 7">
             <a:extLst>
               <a:ext uri="{FF2B5EF4-FFF2-40B4-BE49-F238E27FC236}">
-                <a16:creationId xmlns="" xmlns:a16="http://schemas.microsoft.com/office/drawing/2014/main" id="{4987E008-68E6-4A43-85BC-1A6ACDF91DE1}"/>
+                <a16:creationId xmlns:a16="http://schemas.microsoft.com/office/drawing/2014/main" xmlns="" id="{4987E008-68E6-4A43-85BC-1A6ACDF91DE1}"/>
               </a:ext>
             </a:extLst>
           </p:cNvPr>
@@ -755,7 +754,7 @@
           <p:cNvPr id="11" name="Picture 10">
             <a:extLst>
               <a:ext uri="{FF2B5EF4-FFF2-40B4-BE49-F238E27FC236}">
-                <a16:creationId xmlns="" xmlns:a16="http://schemas.microsoft.com/office/drawing/2014/main" id="{A1F8C892-C868-4DF6-91AB-B18CE632B10F}"/>
+                <a16:creationId xmlns:a16="http://schemas.microsoft.com/office/drawing/2014/main" xmlns="" id="{A1F8C892-C868-4DF6-91AB-B18CE632B10F}"/>
               </a:ext>
             </a:extLst>
           </p:cNvPr>
@@ -941,7 +940,7 @@
           <p:cNvPr id="12" name="Text Placeholder 2">
             <a:extLst>
               <a:ext uri="{FF2B5EF4-FFF2-40B4-BE49-F238E27FC236}">
-                <a16:creationId xmlns="" xmlns:a16="http://schemas.microsoft.com/office/drawing/2014/main" id="{D547E580-E6D6-4D97-BB04-05795A830147}"/>
+                <a16:creationId xmlns:a16="http://schemas.microsoft.com/office/drawing/2014/main" xmlns="" id="{D547E580-E6D6-4D97-BB04-05795A830147}"/>
               </a:ext>
             </a:extLst>
           </p:cNvPr>
@@ -1094,7 +1093,7 @@
           <p:cNvPr id="9" name="Picture 8">
             <a:extLst>
               <a:ext uri="{FF2B5EF4-FFF2-40B4-BE49-F238E27FC236}">
-                <a16:creationId xmlns="" xmlns:a16="http://schemas.microsoft.com/office/drawing/2014/main" id="{7CE2C968-D10A-4226-8FDC-CBC4C7EDD0B7}"/>
+                <a16:creationId xmlns:a16="http://schemas.microsoft.com/office/drawing/2014/main" xmlns="" id="{7CE2C968-D10A-4226-8FDC-CBC4C7EDD0B7}"/>
               </a:ext>
             </a:extLst>
           </p:cNvPr>
@@ -1296,7 +1295,7 @@
             <a:fld id="{C473AACB-D821-4991-9D88-46EB8D29E619}" type="datetimeFigureOut">
               <a:rPr lang="en-GB" smtClean="0"/>
               <a:pPr/>
-              <a:t>12/08/2026</a:t>
+              <a:t>13/08/2026</a:t>
             </a:fld>
             <a:endParaRPr lang="en-GB" dirty="0"/>
           </a:p>
@@ -1380,7 +1379,7 @@
           <p:cNvPr id="9" name="Picture 8">
             <a:extLst>
               <a:ext uri="{FF2B5EF4-FFF2-40B4-BE49-F238E27FC236}">
-                <a16:creationId xmlns="" xmlns:a16="http://schemas.microsoft.com/office/drawing/2014/main" id="{6AB5D66D-00C1-40EA-BFC8-305566F10369}"/>
+                <a16:creationId xmlns:a16="http://schemas.microsoft.com/office/drawing/2014/main" xmlns="" id="{6AB5D66D-00C1-40EA-BFC8-305566F10369}"/>
               </a:ext>
             </a:extLst>
           </p:cNvPr>
@@ -1590,7 +1589,7 @@
             <a:fld id="{C473AACB-D821-4991-9D88-46EB8D29E619}" type="datetimeFigureOut">
               <a:rPr lang="en-GB" smtClean="0"/>
               <a:pPr/>
-              <a:t>12/08/2026</a:t>
+              <a:t>13/08/2026</a:t>
             </a:fld>
             <a:endParaRPr lang="en-GB" dirty="0"/>
           </a:p>
@@ -1843,7 +1842,7 @@
             <a:fld id="{C473AACB-D821-4991-9D88-46EB8D29E619}" type="datetimeFigureOut">
               <a:rPr lang="en-GB" smtClean="0"/>
               <a:pPr/>
-              <a:t>12/08/2026</a:t>
+              <a:t>13/08/2026</a:t>
             </a:fld>
             <a:endParaRPr lang="en-GB" dirty="0"/>
           </a:p>
@@ -1897,7 +1896,7 @@
           <p:cNvPr id="8" name="Picture 7">
             <a:extLst>
               <a:ext uri="{FF2B5EF4-FFF2-40B4-BE49-F238E27FC236}">
-                <a16:creationId xmlns="" xmlns:a16="http://schemas.microsoft.com/office/drawing/2014/main" id="{AD4D4CB4-D965-4BB6-B218-086244C13BAE}"/>
+                <a16:creationId xmlns:a16="http://schemas.microsoft.com/office/drawing/2014/main" xmlns="" id="{AD4D4CB4-D965-4BB6-B218-086244C13BAE}"/>
               </a:ext>
             </a:extLst>
           </p:cNvPr>
@@ -2188,7 +2187,7 @@
             <a:fld id="{C473AACB-D821-4991-9D88-46EB8D29E619}" type="datetimeFigureOut">
               <a:rPr lang="en-GB" smtClean="0"/>
               <a:pPr/>
-              <a:t>12/08/2026</a:t>
+              <a:t>13/08/2026</a:t>
             </a:fld>
             <a:endParaRPr lang="en-GB" dirty="0"/>
           </a:p>
@@ -2332,7 +2331,7 @@
           <p:cNvPr id="11" name="Picture 10">
             <a:extLst>
               <a:ext uri="{FF2B5EF4-FFF2-40B4-BE49-F238E27FC236}">
-                <a16:creationId xmlns="" xmlns:a16="http://schemas.microsoft.com/office/drawing/2014/main" id="{A3B58C4E-0EF0-466C-9740-EC9F485CBD03}"/>
+                <a16:creationId xmlns:a16="http://schemas.microsoft.com/office/drawing/2014/main" xmlns="" id="{A3B58C4E-0EF0-466C-9740-EC9F485CBD03}"/>
               </a:ext>
             </a:extLst>
           </p:cNvPr>
@@ -2560,7 +2559,7 @@
             <a:fld id="{C473AACB-D821-4991-9D88-46EB8D29E619}" type="datetimeFigureOut">
               <a:rPr lang="en-GB" smtClean="0"/>
               <a:pPr/>
-              <a:t>12/08/2026</a:t>
+              <a:t>13/08/2026</a:t>
             </a:fld>
             <a:endParaRPr lang="en-GB" dirty="0"/>
           </a:p>
@@ -2614,7 +2613,7 @@
           <p:cNvPr id="7" name="Picture 6">
             <a:extLst>
               <a:ext uri="{FF2B5EF4-FFF2-40B4-BE49-F238E27FC236}">
-                <a16:creationId xmlns="" xmlns:a16="http://schemas.microsoft.com/office/drawing/2014/main" id="{2D0B9223-1250-44AA-A6C3-F2013B85AEF3}"/>
+                <a16:creationId xmlns:a16="http://schemas.microsoft.com/office/drawing/2014/main" xmlns="" id="{2D0B9223-1250-44AA-A6C3-F2013B85AEF3}"/>
               </a:ext>
             </a:extLst>
           </p:cNvPr>
@@ -2906,7 +2905,7 @@
             <a:fld id="{C473AACB-D821-4991-9D88-46EB8D29E619}" type="datetimeFigureOut">
               <a:rPr lang="en-GB" smtClean="0"/>
               <a:pPr/>
-              <a:t>12/08/2026</a:t>
+              <a:t>13/08/2026</a:t>
             </a:fld>
             <a:endParaRPr lang="en-GB" dirty="0"/>
           </a:p>
@@ -3042,7 +3041,7 @@
           <p:cNvPr id="11" name="Picture 10">
             <a:extLst>
               <a:ext uri="{FF2B5EF4-FFF2-40B4-BE49-F238E27FC236}">
-                <a16:creationId xmlns="" xmlns:a16="http://schemas.microsoft.com/office/drawing/2014/main" id="{D49E1C7C-7E53-49A2-B2C9-52307876DB7E}"/>
+                <a16:creationId xmlns:a16="http://schemas.microsoft.com/office/drawing/2014/main" xmlns="" id="{D49E1C7C-7E53-49A2-B2C9-52307876DB7E}"/>
               </a:ext>
             </a:extLst>
           </p:cNvPr>
@@ -3330,7 +3329,7 @@
             <a:fld id="{C473AACB-D821-4991-9D88-46EB8D29E619}" type="datetimeFigureOut">
               <a:rPr lang="en-GB" smtClean="0"/>
               <a:pPr/>
-              <a:t>12/08/2026</a:t>
+              <a:t>13/08/2026</a:t>
             </a:fld>
             <a:endParaRPr lang="en-GB" dirty="0"/>
           </a:p>
@@ -3384,7 +3383,7 @@
           <p:cNvPr id="9" name="Picture 8">
             <a:extLst>
               <a:ext uri="{FF2B5EF4-FFF2-40B4-BE49-F238E27FC236}">
-                <a16:creationId xmlns="" xmlns:a16="http://schemas.microsoft.com/office/drawing/2014/main" id="{23082AB0-2BB5-46FE-9A17-15E1ACC06965}"/>
+                <a16:creationId xmlns:a16="http://schemas.microsoft.com/office/drawing/2014/main" xmlns="" id="{23082AB0-2BB5-46FE-9A17-15E1ACC06965}"/>
               </a:ext>
             </a:extLst>
           </p:cNvPr>
@@ -3443,7 +3442,7 @@
           <p:cNvPr id="8" name="Picture 7">
             <a:extLst>
               <a:ext uri="{FF2B5EF4-FFF2-40B4-BE49-F238E27FC236}">
-                <a16:creationId xmlns="" xmlns:a16="http://schemas.microsoft.com/office/drawing/2014/main" id="{1862E859-E5AF-4D76-9FC9-2355B24FF141}"/>
+                <a16:creationId xmlns:a16="http://schemas.microsoft.com/office/drawing/2014/main" xmlns="" id="{1862E859-E5AF-4D76-9FC9-2355B24FF141}"/>
               </a:ext>
             </a:extLst>
           </p:cNvPr>
@@ -3565,7 +3564,7 @@
             <a:fld id="{C473AACB-D821-4991-9D88-46EB8D29E619}" type="datetimeFigureOut">
               <a:rPr lang="en-GB" smtClean="0"/>
               <a:pPr/>
-              <a:t>12/08/2026</a:t>
+              <a:t>13/08/2026</a:t>
             </a:fld>
             <a:endParaRPr lang="en-GB" dirty="0"/>
           </a:p>
@@ -3649,7 +3648,7 @@
           <p:cNvPr id="8" name="Picture 7">
             <a:extLst>
               <a:ext uri="{FF2B5EF4-FFF2-40B4-BE49-F238E27FC236}">
-                <a16:creationId xmlns="" xmlns:a16="http://schemas.microsoft.com/office/drawing/2014/main" id="{91908D0E-7544-4687-965B-72EF64AA4C54}"/>
+                <a16:creationId xmlns:a16="http://schemas.microsoft.com/office/drawing/2014/main" xmlns="" id="{91908D0E-7544-4687-965B-72EF64AA4C54}"/>
               </a:ext>
             </a:extLst>
           </p:cNvPr>
@@ -3776,7 +3775,7 @@
             <a:fld id="{C473AACB-D821-4991-9D88-46EB8D29E619}" type="datetimeFigureOut">
               <a:rPr lang="en-GB" smtClean="0"/>
               <a:pPr/>
-              <a:t>12/08/2026</a:t>
+              <a:t>13/08/2026</a:t>
             </a:fld>
             <a:endParaRPr lang="en-GB" dirty="0"/>
           </a:p>
@@ -3860,7 +3859,7 @@
           <p:cNvPr id="8" name="Picture 7">
             <a:extLst>
               <a:ext uri="{FF2B5EF4-FFF2-40B4-BE49-F238E27FC236}">
-                <a16:creationId xmlns="" xmlns:a16="http://schemas.microsoft.com/office/drawing/2014/main" id="{5B5B8CA2-02D4-408C-B548-182D4F5F54B2}"/>
+                <a16:creationId xmlns:a16="http://schemas.microsoft.com/office/drawing/2014/main" xmlns="" id="{5B5B8CA2-02D4-408C-B548-182D4F5F54B2}"/>
               </a:ext>
             </a:extLst>
           </p:cNvPr>
@@ -3994,7 +3993,7 @@
             <a:fld id="{C473AACB-D821-4991-9D88-46EB8D29E619}" type="datetimeFigureOut">
               <a:rPr lang="en-GB" smtClean="0"/>
               <a:pPr/>
-              <a:t>12/08/2026</a:t>
+              <a:t>13/08/2026</a:t>
             </a:fld>
             <a:endParaRPr lang="en-GB" dirty="0"/>
           </a:p>
@@ -4078,7 +4077,7 @@
           <p:cNvPr id="11" name="Picture 10">
             <a:extLst>
               <a:ext uri="{FF2B5EF4-FFF2-40B4-BE49-F238E27FC236}">
-                <a16:creationId xmlns="" xmlns:a16="http://schemas.microsoft.com/office/drawing/2014/main" id="{EA8DB33B-8BF9-4C99-B31C-55246227EFDE}"/>
+                <a16:creationId xmlns:a16="http://schemas.microsoft.com/office/drawing/2014/main" xmlns="" id="{EA8DB33B-8BF9-4C99-B31C-55246227EFDE}"/>
               </a:ext>
             </a:extLst>
           </p:cNvPr>
@@ -4809,7 +4808,7 @@
             <a:fld id="{C473AACB-D821-4991-9D88-46EB8D29E619}" type="datetimeFigureOut">
               <a:rPr lang="en-GB" smtClean="0"/>
               <a:pPr/>
-              <a:t>12/08/2026</a:t>
+              <a:t>13/08/2026</a:t>
             </a:fld>
             <a:endParaRPr lang="en-GB" dirty="0"/>
           </a:p>
@@ -4893,7 +4892,7 @@
           <p:cNvPr id="11" name="Picture 10">
             <a:extLst>
               <a:ext uri="{FF2B5EF4-FFF2-40B4-BE49-F238E27FC236}">
-                <a16:creationId xmlns="" xmlns:a16="http://schemas.microsoft.com/office/drawing/2014/main" id="{EA8DB33B-8BF9-4C99-B31C-55246227EFDE}"/>
+                <a16:creationId xmlns:a16="http://schemas.microsoft.com/office/drawing/2014/main" xmlns="" id="{EA8DB33B-8BF9-4C99-B31C-55246227EFDE}"/>
               </a:ext>
             </a:extLst>
           </p:cNvPr>
@@ -5623,7 +5622,7 @@
             <a:fld id="{C473AACB-D821-4991-9D88-46EB8D29E619}" type="datetimeFigureOut">
               <a:rPr lang="en-GB" smtClean="0"/>
               <a:pPr/>
-              <a:t>12/08/2026</a:t>
+              <a:t>13/08/2026</a:t>
             </a:fld>
             <a:endParaRPr lang="en-GB" dirty="0"/>
           </a:p>
@@ -5872,7 +5871,7 @@
             <a:fld id="{C473AACB-D821-4991-9D88-46EB8D29E619}" type="datetimeFigureOut">
               <a:rPr lang="en-GB" smtClean="0"/>
               <a:pPr/>
-              <a:t>12/08/2026</a:t>
+              <a:t>13/08/2026</a:t>
             </a:fld>
             <a:endParaRPr lang="en-GB" dirty="0"/>
           </a:p>
@@ -5926,7 +5925,7 @@
           <p:cNvPr id="7" name="Picture 6">
             <a:extLst>
               <a:ext uri="{FF2B5EF4-FFF2-40B4-BE49-F238E27FC236}">
-                <a16:creationId xmlns="" xmlns:a16="http://schemas.microsoft.com/office/drawing/2014/main" id="{6331EFED-43C1-4CBA-8BE3-308E3AA13B9B}"/>
+                <a16:creationId xmlns:a16="http://schemas.microsoft.com/office/drawing/2014/main" xmlns="" id="{6331EFED-43C1-4CBA-8BE3-308E3AA13B9B}"/>
               </a:ext>
             </a:extLst>
           </p:cNvPr>
@@ -6136,7 +6135,7 @@
             <a:fld id="{C473AACB-D821-4991-9D88-46EB8D29E619}" type="datetimeFigureOut">
               <a:rPr lang="en-GB" smtClean="0"/>
               <a:pPr/>
-              <a:t>12/08/2026</a:t>
+              <a:t>13/08/2026</a:t>
             </a:fld>
             <a:endParaRPr lang="en-GB" dirty="0"/>
           </a:p>
@@ -6190,7 +6189,7 @@
           <p:cNvPr id="9" name="Picture 8">
             <a:extLst>
               <a:ext uri="{FF2B5EF4-FFF2-40B4-BE49-F238E27FC236}">
-                <a16:creationId xmlns="" xmlns:a16="http://schemas.microsoft.com/office/drawing/2014/main" id="{1034EA63-4BE3-4A73-A7E6-4A75BE4C1D48}"/>
+                <a16:creationId xmlns:a16="http://schemas.microsoft.com/office/drawing/2014/main" xmlns="" id="{1034EA63-4BE3-4A73-A7E6-4A75BE4C1D48}"/>
               </a:ext>
             </a:extLst>
           </p:cNvPr>
@@ -6249,7 +6248,7 @@
           <p:cNvPr id="10" name="Picture 9">
             <a:extLst>
               <a:ext uri="{FF2B5EF4-FFF2-40B4-BE49-F238E27FC236}">
-                <a16:creationId xmlns="" xmlns:a16="http://schemas.microsoft.com/office/drawing/2014/main" id="{204DC1E6-B5F4-4160-90F3-351FB3242E92}"/>
+                <a16:creationId xmlns:a16="http://schemas.microsoft.com/office/drawing/2014/main" xmlns="" id="{204DC1E6-B5F4-4160-90F3-351FB3242E92}"/>
               </a:ext>
             </a:extLst>
           </p:cNvPr>
@@ -6576,7 +6575,7 @@
             <a:fld id="{C473AACB-D821-4991-9D88-46EB8D29E619}" type="datetimeFigureOut">
               <a:rPr lang="en-GB" smtClean="0"/>
               <a:pPr/>
-              <a:t>12/08/2026</a:t>
+              <a:t>13/08/2026</a:t>
             </a:fld>
             <a:endParaRPr lang="en-GB" dirty="0"/>
           </a:p>
@@ -6660,7 +6659,7 @@
           <p:cNvPr id="6" name="Picture 5">
             <a:extLst>
               <a:ext uri="{FF2B5EF4-FFF2-40B4-BE49-F238E27FC236}">
-                <a16:creationId xmlns="" xmlns:a16="http://schemas.microsoft.com/office/drawing/2014/main" id="{E7897C67-3827-4595-8E3A-71E9F2EAB3AF}"/>
+                <a16:creationId xmlns:a16="http://schemas.microsoft.com/office/drawing/2014/main" xmlns="" id="{E7897C67-3827-4595-8E3A-71E9F2EAB3AF}"/>
               </a:ext>
             </a:extLst>
           </p:cNvPr>
@@ -6731,7 +6730,7 @@
             <a:fld id="{C473AACB-D821-4991-9D88-46EB8D29E619}" type="datetimeFigureOut">
               <a:rPr lang="en-GB" smtClean="0"/>
               <a:pPr/>
-              <a:t>12/08/2026</a:t>
+              <a:t>13/08/2026</a:t>
             </a:fld>
             <a:endParaRPr lang="en-GB" dirty="0"/>
           </a:p>
@@ -6828,7 +6827,7 @@
             <a:fld id="{C473AACB-D821-4991-9D88-46EB8D29E619}" type="datetimeFigureOut">
               <a:rPr lang="en-GB" smtClean="0"/>
               <a:pPr/>
-              <a:t>12/08/2026</a:t>
+              <a:t>13/08/2026</a:t>
             </a:fld>
             <a:endParaRPr lang="en-GB" dirty="0"/>
           </a:p>
@@ -6882,7 +6881,7 @@
           <p:cNvPr id="6" name="Picture 5">
             <a:extLst>
               <a:ext uri="{FF2B5EF4-FFF2-40B4-BE49-F238E27FC236}">
-                <a16:creationId xmlns="" xmlns:a16="http://schemas.microsoft.com/office/drawing/2014/main" id="{F1825398-026A-4668-BB48-C16AD1C9062B}"/>
+                <a16:creationId xmlns:a16="http://schemas.microsoft.com/office/drawing/2014/main" xmlns="" id="{F1825398-026A-4668-BB48-C16AD1C9062B}"/>
               </a:ext>
             </a:extLst>
           </p:cNvPr>
@@ -7605,7 +7604,7 @@
             <a:fld id="{C473AACB-D821-4991-9D88-46EB8D29E619}" type="datetimeFigureOut">
               <a:rPr lang="en-GB" smtClean="0"/>
               <a:pPr/>
-              <a:t>12/08/2026</a:t>
+              <a:t>13/08/2026</a:t>
             </a:fld>
             <a:endParaRPr lang="en-GB" dirty="0"/>
           </a:p>
@@ -8182,7 +8181,6 @@
               <a:rPr lang="en-GB" sz="1400" dirty="0"/>
               <a:t>Part 10 - EEPROM Operations</a:t>
             </a:r>
-            <a:endParaRPr lang="en-GB" sz="1400" dirty="0"/>
           </a:p>
         </p:txBody>
       </p:sp>
@@ -10997,7 +10995,6 @@
               <a:rPr lang="en-GB" dirty="0"/>
               <a:t>Part 10 - EEPROM Operations</a:t>
             </a:r>
-            <a:endParaRPr lang="en-GB" dirty="0"/>
           </a:p>
         </p:txBody>
       </p:sp>
@@ -11087,334 +11084,6 @@
     <p:extLst>
       <p:ext uri="{BB962C8B-B14F-4D97-AF65-F5344CB8AC3E}">
         <p14:creationId xmlns:p14="http://schemas.microsoft.com/office/powerpoint/2010/main" val="2022470098"/>
-      </p:ext>
-    </p:extLst>
-  </p:cSld>
-  <p:clrMapOvr>
-    <a:masterClrMapping/>
-  </p:clrMapOvr>
-  <mc:AlternateContent xmlns:mc="http://schemas.openxmlformats.org/markup-compatibility/2006" xmlns:p14="http://schemas.microsoft.com/office/powerpoint/2010/main">
-    <mc:Choice Requires="p14">
-      <p:transition spd="slow" p14:dur="2000"/>
-    </mc:Choice>
-    <mc:Fallback xmlns="">
-      <p:transition spd="slow"/>
-    </mc:Fallback>
-  </mc:AlternateContent>
-  <p:timing>
-    <p:tnLst>
-      <p:par>
-        <p:cTn id="1" dur="indefinite" restart="never" nodeType="tmRoot"/>
-      </p:par>
-    </p:tnLst>
-  </p:timing>
-</p:sld>
-</file>
-
-<file path=ppt/slides/slide19.xml><?xml version="1.0" encoding="utf-8"?>
-<p:sld xmlns:a="http://schemas.openxmlformats.org/drawingml/2006/main" xmlns:r="http://schemas.openxmlformats.org/officeDocument/2006/relationships" xmlns:p="http://schemas.openxmlformats.org/presentationml/2006/main">
-  <p:cSld>
-    <p:spTree>
-      <p:nvGrpSpPr>
-        <p:cNvPr id="1" name=""/>
-        <p:cNvGrpSpPr/>
-        <p:nvPr/>
-      </p:nvGrpSpPr>
-      <p:grpSpPr>
-        <a:xfrm>
-          <a:off x="0" y="0"/>
-          <a:ext cx="0" cy="0"/>
-          <a:chOff x="0" y="0"/>
-          <a:chExt cx="0" cy="0"/>
-        </a:xfrm>
-      </p:grpSpPr>
-      <p:sp>
-        <p:nvSpPr>
-          <p:cNvPr id="2" name="Title 1"/>
-          <p:cNvSpPr>
-            <a:spLocks noGrp="1"/>
-          </p:cNvSpPr>
-          <p:nvPr>
-            <p:ph type="title"/>
-          </p:nvPr>
-        </p:nvSpPr>
-        <p:spPr/>
-        <p:txBody>
-          <a:bodyPr/>
-          <a:lstStyle/>
-          <a:p>
-            <a:r>
-              <a:rPr lang="en-GB" dirty="0" smtClean="0"/>
-              <a:t>GCBASIC</a:t>
-            </a:r>
-            <a:endParaRPr lang="en-GB" dirty="0"/>
-          </a:p>
-        </p:txBody>
-      </p:sp>
-      <p:pic>
-        <p:nvPicPr>
-          <p:cNvPr id="1026" name="Picture 2" descr="D:\Build\AnobiumTransparent.jpg"/>
-          <p:cNvPicPr>
-            <a:picLocks noChangeAspect="1" noChangeArrowheads="1"/>
-          </p:cNvPicPr>
-          <p:nvPr/>
-        </p:nvPicPr>
-        <p:blipFill>
-          <a:blip r:embed="rId2" cstate="print"/>
-          <a:srcRect/>
-          <a:stretch>
-            <a:fillRect/>
-          </a:stretch>
-        </p:blipFill>
-        <p:spPr bwMode="auto">
-          <a:xfrm>
-            <a:off x="7315141" y="79363"/>
-            <a:ext cx="1828859" cy="771550"/>
-          </a:xfrm>
-          <a:prstGeom prst="rect">
-            <a:avLst/>
-          </a:prstGeom>
-          <a:noFill/>
-        </p:spPr>
-      </p:pic>
-      <p:sp>
-        <p:nvSpPr>
-          <p:cNvPr id="4" name="AutoShape 2" descr="ICSP connection"/>
-          <p:cNvSpPr>
-            <a:spLocks noChangeAspect="1" noChangeArrowheads="1"/>
-          </p:cNvSpPr>
-          <p:nvPr/>
-        </p:nvSpPr>
-        <p:spPr bwMode="auto">
-          <a:xfrm>
-            <a:off x="155575" y="-144462"/>
-            <a:ext cx="304800" cy="304801"/>
-          </a:xfrm>
-          <a:prstGeom prst="rect">
-            <a:avLst/>
-          </a:prstGeom>
-          <a:noFill/>
-        </p:spPr>
-        <p:txBody>
-          <a:bodyPr vert="horz" wrap="square" lIns="85064" tIns="42531" rIns="85064" bIns="42531" numCol="1" anchor="t" anchorCtr="0" compatLnSpc="1">
-            <a:prstTxWarp prst="textNoShape">
-              <a:avLst/>
-            </a:prstTxWarp>
-          </a:bodyPr>
-          <a:lstStyle/>
-          <a:p>
-            <a:endParaRPr lang="en-GB" dirty="0"/>
-          </a:p>
-        </p:txBody>
-      </p:sp>
-      <p:sp>
-        <p:nvSpPr>
-          <p:cNvPr id="7" name="Rectangle 6"/>
-          <p:cNvSpPr/>
-          <p:nvPr/>
-        </p:nvSpPr>
-        <p:spPr>
-          <a:xfrm>
-            <a:off x="539552" y="2067694"/>
-            <a:ext cx="7367888" cy="707886"/>
-          </a:xfrm>
-          <a:prstGeom prst="rect">
-            <a:avLst/>
-          </a:prstGeom>
-          <a:noFill/>
-        </p:spPr>
-        <p:txBody>
-          <a:bodyPr wrap="square" lIns="91440" tIns="45720" rIns="91440" bIns="45720">
-            <a:spAutoFit/>
-          </a:bodyPr>
-          <a:lstStyle/>
-          <a:p>
-            <a:pPr algn="ctr"/>
-            <a:r>
-              <a:rPr lang="en-US" sz="4000" b="1" dirty="0" smtClean="0">
-                <a:ln w="10541" cmpd="sng">
-                  <a:solidFill>
-                    <a:srgbClr val="7D7D7D">
-                      <a:tint val="100000"/>
-                      <a:shade val="100000"/>
-                      <a:satMod val="110000"/>
-                    </a:srgbClr>
-                  </a:solidFill>
-                  <a:prstDash val="solid"/>
-                </a:ln>
-                <a:solidFill>
-                  <a:srgbClr val="FF0000"/>
-                </a:solidFill>
-              </a:rPr>
-              <a:t>Like and subscribe!</a:t>
-            </a:r>
-          </a:p>
-        </p:txBody>
-      </p:sp>
-      <p:pic>
-        <p:nvPicPr>
-          <p:cNvPr id="2050" name="Picture 2" descr="PIC18F46Q35-NHX-Regular.png"/>
-          <p:cNvPicPr>
-            <a:picLocks noChangeAspect="1" noChangeArrowheads="1"/>
-          </p:cNvPicPr>
-          <p:nvPr/>
-        </p:nvPicPr>
-        <p:blipFill>
-          <a:blip r:embed="rId3" cstate="print">
-            <a:extLst>
-              <a:ext uri="{28A0092B-C50C-407E-A947-70E740481C1C}">
-                <a14:useLocalDpi xmlns:a14="http://schemas.microsoft.com/office/drawing/2010/main" val="0"/>
-              </a:ext>
-            </a:extLst>
-          </a:blip>
-          <a:srcRect/>
-          <a:stretch>
-            <a:fillRect/>
-          </a:stretch>
-        </p:blipFill>
-        <p:spPr bwMode="auto">
-          <a:xfrm>
-            <a:off x="1907704" y="3795886"/>
-            <a:ext cx="1280591" cy="1128021"/>
-          </a:xfrm>
-          <a:prstGeom prst="rect">
-            <a:avLst/>
-          </a:prstGeom>
-          <a:noFill/>
-          <a:extLst>
-            <a:ext uri="{909E8E84-426E-40DD-AFC4-6F175D3DCCD1}">
-              <a14:hiddenFill xmlns:a14="http://schemas.microsoft.com/office/drawing/2010/main">
-                <a:solidFill>
-                  <a:srgbClr val="FFFFFF"/>
-                </a:solidFill>
-              </a14:hiddenFill>
-            </a:ext>
-          </a:extLst>
-        </p:spPr>
-      </p:pic>
-      <p:sp>
-        <p:nvSpPr>
-          <p:cNvPr id="3" name="AutoShape 4" descr="PIC18F46Q35-S2X-Regular.png"/>
-          <p:cNvSpPr>
-            <a:spLocks noChangeAspect="1" noChangeArrowheads="1"/>
-          </p:cNvSpPr>
-          <p:nvPr/>
-        </p:nvSpPr>
-        <p:spPr bwMode="auto">
-          <a:xfrm>
-            <a:off x="307975" y="7937"/>
-            <a:ext cx="304800" cy="304801"/>
-          </a:xfrm>
-          <a:prstGeom prst="rect">
-            <a:avLst/>
-          </a:prstGeom>
-          <a:noFill/>
-          <a:extLst>
-            <a:ext uri="{909E8E84-426E-40DD-AFC4-6F175D3DCCD1}">
-              <a14:hiddenFill xmlns:a14="http://schemas.microsoft.com/office/drawing/2010/main">
-                <a:solidFill>
-                  <a:srgbClr val="FFFFFF"/>
-                </a:solidFill>
-              </a14:hiddenFill>
-            </a:ext>
-          </a:extLst>
-        </p:spPr>
-        <p:txBody>
-          <a:bodyPr vert="horz" wrap="square" lIns="91440" tIns="45720" rIns="91440" bIns="45720" numCol="1" anchor="t" anchorCtr="0" compatLnSpc="1">
-            <a:prstTxWarp prst="textNoShape">
-              <a:avLst/>
-            </a:prstTxWarp>
-          </a:bodyPr>
-          <a:lstStyle/>
-          <a:p>
-            <a:endParaRPr lang="en-GB"/>
-          </a:p>
-        </p:txBody>
-      </p:sp>
-      <p:sp>
-        <p:nvSpPr>
-          <p:cNvPr id="5" name="AutoShape 6" descr="PIC18F46Q35-S2X-Regular.png"/>
-          <p:cNvSpPr>
-            <a:spLocks noChangeAspect="1" noChangeArrowheads="1"/>
-          </p:cNvSpPr>
-          <p:nvPr/>
-        </p:nvSpPr>
-        <p:spPr bwMode="auto">
-          <a:xfrm>
-            <a:off x="460375" y="160337"/>
-            <a:ext cx="304800" cy="304801"/>
-          </a:xfrm>
-          <a:prstGeom prst="rect">
-            <a:avLst/>
-          </a:prstGeom>
-          <a:noFill/>
-          <a:extLst>
-            <a:ext uri="{909E8E84-426E-40DD-AFC4-6F175D3DCCD1}">
-              <a14:hiddenFill xmlns:a14="http://schemas.microsoft.com/office/drawing/2010/main">
-                <a:solidFill>
-                  <a:srgbClr val="FFFFFF"/>
-                </a:solidFill>
-              </a14:hiddenFill>
-            </a:ext>
-          </a:extLst>
-        </p:spPr>
-        <p:txBody>
-          <a:bodyPr vert="horz" wrap="square" lIns="91440" tIns="45720" rIns="91440" bIns="45720" numCol="1" anchor="t" anchorCtr="0" compatLnSpc="1">
-            <a:prstTxWarp prst="textNoShape">
-              <a:avLst/>
-            </a:prstTxWarp>
-          </a:bodyPr>
-          <a:lstStyle/>
-          <a:p>
-            <a:endParaRPr lang="en-GB"/>
-          </a:p>
-        </p:txBody>
-      </p:sp>
-      <p:pic>
-        <p:nvPicPr>
-          <p:cNvPr id="2056" name="Picture 8" descr="PIC18F46Q35-S2X-Regular.png"/>
-          <p:cNvPicPr>
-            <a:picLocks noChangeAspect="1" noChangeArrowheads="1"/>
-          </p:cNvPicPr>
-          <p:nvPr/>
-        </p:nvPicPr>
-        <p:blipFill>
-          <a:blip r:embed="rId4">
-            <a:extLst>
-              <a:ext uri="{28A0092B-C50C-407E-A947-70E740481C1C}">
-                <a14:useLocalDpi xmlns:a14="http://schemas.microsoft.com/office/drawing/2010/main" val="0"/>
-              </a:ext>
-            </a:extLst>
-          </a:blip>
-          <a:srcRect/>
-          <a:stretch>
-            <a:fillRect/>
-          </a:stretch>
-        </p:blipFill>
-        <p:spPr bwMode="auto">
-          <a:xfrm>
-            <a:off x="4428316" y="3540195"/>
-            <a:ext cx="2692623" cy="1256908"/>
-          </a:xfrm>
-          <a:prstGeom prst="rect">
-            <a:avLst/>
-          </a:prstGeom>
-          <a:noFill/>
-          <a:extLst>
-            <a:ext uri="{909E8E84-426E-40DD-AFC4-6F175D3DCCD1}">
-              <a14:hiddenFill xmlns:a14="http://schemas.microsoft.com/office/drawing/2010/main">
-                <a:solidFill>
-                  <a:srgbClr val="FFFFFF"/>
-                </a:solidFill>
-              </a14:hiddenFill>
-            </a:ext>
-          </a:extLst>
-        </p:spPr>
-      </p:pic>
-    </p:spTree>
-    <p:extLst>
-      <p:ext uri="{BB962C8B-B14F-4D97-AF65-F5344CB8AC3E}">
-        <p14:creationId xmlns:p14="http://schemas.microsoft.com/office/powerpoint/2010/main" val="2766978035"/>
       </p:ext>
     </p:extLst>
   </p:cSld>
@@ -11786,7 +11455,6 @@
               <a:rPr lang="en-GB" dirty="0"/>
               <a:t>Part 10 - EEPROM Operations</a:t>
             </a:r>
-            <a:endParaRPr lang="en-GB" dirty="0"/>
           </a:p>
         </p:txBody>
       </p:sp>
@@ -14637,7 +14305,7 @@
   <a:extraClrSchemeLst/>
   <a:extLst>
     <a:ext uri="{05A4C25C-085E-4340-85A3-A5531E510DB2}">
-      <thm15:themeFamily xmlns="" xmlns:thm15="http://schemas.microsoft.com/office/thememl/2012/main" name="GCstudioThemeLight" id="{4C740F94-33C0-4EEC-9234-F56C348A0987}" vid="{A43F8B96-90D8-489D-B80F-92F9D6F351CC}"/>
+      <thm15:themeFamily xmlns:thm15="http://schemas.microsoft.com/office/thememl/2012/main" xmlns="" name="GCstudioThemeLight" id="{4C740F94-33C0-4EEC-9234-F56C348A0987}" vid="{A43F8B96-90D8-489D-B80F-92F9D6F351CC}"/>
     </a:ext>
   </a:extLst>
 </a:theme>
